--- a/classes/parte-1-redes-y-seguridad-de-redes/031-nmap-deteccion-de-servicios-y-fingerprinting-de-os/clase-031-presentacion.pptx
+++ b/classes/parte-1-redes-y-seguridad-de-redes/031-nmap-deteccion-de-servicios-y-fingerprinting-de-os/clase-031-presentacion.pptx
@@ -17,6 +17,9 @@
     <p:sldId id="265" r:id="rId16"/>
     <p:sldId id="266" r:id="rId17"/>
     <p:sldId id="267" r:id="rId18"/>
+    <p:sldId id="268" r:id="rId19"/>
+    <p:sldId id="269" r:id="rId20"/>
+    <p:sldId id="270" r:id="rId21"/>
   </p:sldIdLst>
   <p:sldSz cx="9144000" cy="6858000" type="screen4x3"/>
   <p:notesSz cx="6858000" cy="9144000"/>
@@ -3198,7 +3201,7 @@
                   <a:srgbClr val="0B3D2E"/>
                 </a:solidFill>
               </a:rPr>
-              <a:t>⚠️ Errores comunes</a:t>
+              <a:t>✍️ Ejercicios</a:t>
             </a:r>
           </a:p>
         </p:txBody>
@@ -3236,67 +3239,82 @@
                   <a:srgbClr val="22282E"/>
                 </a:solidFill>
               </a:rPr>
-              <a:t>•  -O no identifica el OS — Falta un puerto cerrado o el host filtra; usa --osscan-guess o abre el alcance de puertos</a:t>
-            </a:r>
-          </a:p>
-          <a:p>
-            <a:pPr>
-              <a:spcAft>
-                <a:spcPts val="600"/>
-              </a:spcAft>
-            </a:pPr>
-            <a:r>
-              <a:rPr sz="1500">
-                <a:solidFill>
-                  <a:srgbClr val="22282E"/>
-                </a:solidFill>
-              </a:rPr>
-              <a:t>•  Versión aparece como "tcpwrapped" — El servicio cierra la conexión tras el handshake; suele indicar filtrado o control de acceso</a:t>
-            </a:r>
-          </a:p>
-          <a:p>
-            <a:pPr>
-              <a:spcAft>
-                <a:spcPts val="600"/>
-              </a:spcAft>
-            </a:pPr>
-            <a:r>
-              <a:rPr sz="1500">
-                <a:solidFill>
-                  <a:srgbClr val="22282E"/>
-                </a:solidFill>
-              </a:rPr>
-              <a:t>•  -sV muy lento — Intensidad alta o muchos puertos; baja intensidad o limita con -p</a:t>
-            </a:r>
-          </a:p>
-          <a:p>
-            <a:pPr>
-              <a:spcAft>
-                <a:spcPts val="600"/>
-              </a:spcAft>
-            </a:pPr>
-            <a:r>
-              <a:rPr sz="1500">
-                <a:solidFill>
-                  <a:srgbClr val="22282E"/>
-                </a:solidFill>
-              </a:rPr>
-              <a:t>•  CPE ausente — Nmap no reconoció el producto; sube intensidad o revisa manualmente el banner</a:t>
-            </a:r>
-          </a:p>
-          <a:p>
-            <a:pPr>
-              <a:spcAft>
-                <a:spcPts val="600"/>
-              </a:spcAft>
-            </a:pPr>
-            <a:r>
-              <a:rPr sz="1500">
-                <a:solidFill>
-                  <a:srgbClr val="22282E"/>
-                </a:solidFill>
-              </a:rPr>
-              <a:t>•  OS reportado con baja fiabilidad — Pila TCP/IP atípica (NAT, dispositivos embebidos); toma el resultado como conjetura</a:t>
+              <a:t>•  Escanea un servicio y anota producto, versión y CPE exacto.</a:t>
+            </a:r>
+          </a:p>
+          <a:p>
+            <a:pPr>
+              <a:spcAft>
+                <a:spcPts val="600"/>
+              </a:spcAft>
+            </a:pPr>
+            <a:r>
+              <a:rPr sz="1500">
+                <a:solidFill>
+                  <a:srgbClr val="22282E"/>
+                </a:solidFill>
+              </a:rPr>
+              <a:t>•  Compara -O con y sin --osscan-guess en un host difícil de identificar.</a:t>
+            </a:r>
+          </a:p>
+          <a:p>
+            <a:pPr>
+              <a:spcAft>
+                <a:spcPts val="600"/>
+              </a:spcAft>
+            </a:pPr>
+            <a:r>
+              <a:rPr sz="1500">
+                <a:solidFill>
+                  <a:srgbClr val="22282E"/>
+                </a:solidFill>
+              </a:rPr>
+              <a:t>•  Ejecuta -A y clasifica qué información aporta cada sección de la salida.</a:t>
+            </a:r>
+          </a:p>
+          <a:p>
+            <a:pPr>
+              <a:spcAft>
+                <a:spcPts val="600"/>
+              </a:spcAft>
+            </a:pPr>
+            <a:r>
+              <a:rPr sz="1500">
+                <a:solidFill>
+                  <a:srgbClr val="22282E"/>
+                </a:solidFill>
+              </a:rPr>
+              <a:t>•  Investiga por qué la detección de OS necesita al menos un puerto abierto y uno cerrado.</a:t>
+            </a:r>
+          </a:p>
+          <a:p>
+            <a:pPr>
+              <a:spcAft>
+                <a:spcPts val="600"/>
+              </a:spcAft>
+            </a:pPr>
+            <a:r>
+              <a:rPr sz="1500">
+                <a:solidFill>
+                  <a:srgbClr val="22282E"/>
+                </a:solidFill>
+              </a:rPr>
+              <a:t>•  Toma un CPE detectado y busca (sin explotar) CVEs asociados en NVD.</a:t>
+            </a:r>
+          </a:p>
+          <a:p>
+            <a:pPr>
+              <a:spcAft>
+                <a:spcPts val="600"/>
+              </a:spcAft>
+            </a:pPr>
+            <a:r>
+              <a:rPr sz="1500">
+                <a:solidFill>
+                  <a:srgbClr val="22282E"/>
+                </a:solidFill>
+              </a:rPr>
+              <a:t>•  Ajusta --version-intensity de 0 a 9 sobre el mismo host y compara resultados y ruido.</a:t>
             </a:r>
           </a:p>
         </p:txBody>
@@ -3347,7 +3365,7 @@
                   <a:srgbClr val="0B3D2E"/>
                 </a:solidFill>
               </a:rPr>
-              <a:t>❓ Preguntas frecuentes</a:t>
+              <a:t>📝 Reto verificable</a:t>
             </a:r>
           </a:p>
         </p:txBody>
@@ -3385,97 +3403,22 @@
                   <a:srgbClr val="22282E"/>
                 </a:solidFill>
               </a:rPr>
-              <a:t>•  ❓ ¿-sV explota el servicio?</a:t>
-            </a:r>
-          </a:p>
-          <a:p>
-            <a:pPr>
-              <a:spcAft>
-                <a:spcPts val="600"/>
-              </a:spcAft>
-            </a:pPr>
-            <a:r>
-              <a:rPr sz="1500">
-                <a:solidFill>
-                  <a:srgbClr val="22282E"/>
-                </a:solidFill>
-              </a:rPr>
-              <a:t>•  No. Solo envía sondas benignas y compara banners/respuestas. No intenta comprometer nada.</a:t>
-            </a:r>
-          </a:p>
-          <a:p>
-            <a:pPr>
-              <a:spcAft>
-                <a:spcPts val="600"/>
-              </a:spcAft>
-            </a:pPr>
-            <a:r>
-              <a:rPr sz="1500">
-                <a:solidFill>
-                  <a:srgbClr val="22282E"/>
-                </a:solidFill>
-              </a:rPr>
-              <a:t>•  ❓ ¿Puedo confiar al 100% en la versión detectada?</a:t>
-            </a:r>
-          </a:p>
-          <a:p>
-            <a:pPr>
-              <a:spcAft>
-                <a:spcPts val="600"/>
-              </a:spcAft>
-            </a:pPr>
-            <a:r>
-              <a:rPr sz="1500">
-                <a:solidFill>
-                  <a:srgbClr val="22282E"/>
-                </a:solidFill>
-              </a:rPr>
-              <a:t>•  No siempre. Los banners pueden estar ofuscados o modificados. Trátalo como una hipótesis fuerte, verificable con más pruebas.</a:t>
-            </a:r>
-          </a:p>
-          <a:p>
-            <a:pPr>
-              <a:spcAft>
-                <a:spcPts val="600"/>
-              </a:spcAft>
-            </a:pPr>
-            <a:r>
-              <a:rPr sz="1500">
-                <a:solidFill>
-                  <a:srgbClr val="22282E"/>
-                </a:solidFill>
-              </a:rPr>
-              <a:t>•  ❓ ¿Por qué el OS a veces sale como varias opciones?</a:t>
-            </a:r>
-          </a:p>
-          <a:p>
-            <a:pPr>
-              <a:spcAft>
-                <a:spcPts val="600"/>
-              </a:spcAft>
-            </a:pPr>
-            <a:r>
-              <a:rPr sz="1500">
-                <a:solidFill>
-                  <a:srgbClr val="22282E"/>
-                </a:solidFill>
-              </a:rPr>
-              <a:t>•  Cuando ninguna huella supera el umbral de fiabilidad, Nmap lista las candidatas más probables. Dispositivos tras NAT o embebidos complican la identificación.</a:t>
-            </a:r>
-          </a:p>
-          <a:p>
-            <a:pPr>
-              <a:spcAft>
-                <a:spcPts val="600"/>
-              </a:spcAft>
-            </a:pPr>
-            <a:r>
-              <a:rPr sz="1500">
-                <a:solidFill>
-                  <a:srgbClr val="22282E"/>
-                </a:solidFill>
-              </a:rPr>
-              <a:t>•  ❓ ¿Qué gano con el CPE?</a:t>
+              <a:t>•  Genera un inventario de servicios de un host de laboratorio con producto, versión y CPE, y añade una columna "riesgo potencial" citando al menos un CVE público asociado a una de las versiones…</a:t>
+            </a:r>
+          </a:p>
+          <a:p>
+            <a:pPr>
+              <a:spcAft>
+                <a:spcPts val="600"/>
+              </a:spcAft>
+            </a:pPr>
+            <a:r>
+              <a:rPr sz="1500">
+                <a:solidFill>
+                  <a:srgbClr val="22282E"/>
+                </a:solidFill>
+              </a:rPr>
+              <a:t>•  Criterio de aceptación: las versiones y CPE coinciden con un reescaneo del revisor, y el CVE citado corresponde realmente a la versión reportada según NVD.</a:t>
             </a:r>
           </a:p>
         </p:txBody>
@@ -3526,7 +3469,7 @@
                   <a:srgbClr val="0B3D2E"/>
                 </a:solidFill>
               </a:rPr>
-              <a:t>🔗 Referencias</a:t>
+              <a:t>⚠️ Errores comunes</a:t>
             </a:r>
           </a:p>
         </p:txBody>
@@ -3564,6 +3507,334 @@
                   <a:srgbClr val="22282E"/>
                 </a:solidFill>
               </a:rPr>
+              <a:t>•  -O no identifica el OS — Falta un puerto cerrado o el host filtra; usa --osscan-guess o abre el alcance de puertos</a:t>
+            </a:r>
+          </a:p>
+          <a:p>
+            <a:pPr>
+              <a:spcAft>
+                <a:spcPts val="600"/>
+              </a:spcAft>
+            </a:pPr>
+            <a:r>
+              <a:rPr sz="1500">
+                <a:solidFill>
+                  <a:srgbClr val="22282E"/>
+                </a:solidFill>
+              </a:rPr>
+              <a:t>•  Versión aparece como "tcpwrapped" — El servicio cierra la conexión tras el handshake; suele indicar filtrado o control de acceso</a:t>
+            </a:r>
+          </a:p>
+          <a:p>
+            <a:pPr>
+              <a:spcAft>
+                <a:spcPts val="600"/>
+              </a:spcAft>
+            </a:pPr>
+            <a:r>
+              <a:rPr sz="1500">
+                <a:solidFill>
+                  <a:srgbClr val="22282E"/>
+                </a:solidFill>
+              </a:rPr>
+              <a:t>•  -sV muy lento — Intensidad alta o muchos puertos; baja intensidad o limita con -p</a:t>
+            </a:r>
+          </a:p>
+          <a:p>
+            <a:pPr>
+              <a:spcAft>
+                <a:spcPts val="600"/>
+              </a:spcAft>
+            </a:pPr>
+            <a:r>
+              <a:rPr sz="1500">
+                <a:solidFill>
+                  <a:srgbClr val="22282E"/>
+                </a:solidFill>
+              </a:rPr>
+              <a:t>•  CPE ausente — Nmap no reconoció el producto; sube intensidad o revisa manualmente el banner</a:t>
+            </a:r>
+          </a:p>
+          <a:p>
+            <a:pPr>
+              <a:spcAft>
+                <a:spcPts val="600"/>
+              </a:spcAft>
+            </a:pPr>
+            <a:r>
+              <a:rPr sz="1500">
+                <a:solidFill>
+                  <a:srgbClr val="22282E"/>
+                </a:solidFill>
+              </a:rPr>
+              <a:t>•  OS reportado con baja fiabilidad — Pila TCP/IP atípica (NAT, dispositivos embebidos); toma el resultado como conjetura</a:t>
+            </a:r>
+          </a:p>
+        </p:txBody>
+      </p:sp>
+    </p:spTree>
+  </p:cSld>
+  <p:clrMapOvr>
+    <a:masterClrMapping/>
+  </p:clrMapOvr>
+</p:sld>
+</file>
+
+<file path=ppt/slides/slide13.xml><?xml version="1.0" encoding="utf-8"?>
+<p:sld xmlns:a="http://schemas.openxmlformats.org/drawingml/2006/main" xmlns:p="http://schemas.openxmlformats.org/presentationml/2006/main" xmlns:r="http://schemas.openxmlformats.org/officeDocument/2006/relationships">
+  <p:cSld>
+    <p:spTree>
+      <p:nvGrpSpPr>
+        <p:cNvPr id="1" name=""/>
+        <p:cNvGrpSpPr/>
+        <p:nvPr/>
+      </p:nvGrpSpPr>
+      <p:grpSpPr/>
+      <p:sp>
+        <p:nvSpPr>
+          <p:cNvPr id="2" name="TextBox 1"/>
+          <p:cNvSpPr txBox="1"/>
+          <p:nvPr/>
+        </p:nvSpPr>
+        <p:spPr>
+          <a:xfrm>
+            <a:off x="457200" y="320040"/>
+            <a:ext cx="8229600" cy="822960"/>
+          </a:xfrm>
+          <a:prstGeom prst="rect">
+            <a:avLst/>
+          </a:prstGeom>
+          <a:noFill/>
+        </p:spPr>
+        <p:txBody>
+          <a:bodyPr wrap="square">
+            <a:spAutoFit/>
+          </a:bodyPr>
+          <a:lstStyle/>
+          <a:p>
+            <a:r>
+              <a:rPr sz="2600" b="1">
+                <a:solidFill>
+                  <a:srgbClr val="0B3D2E"/>
+                </a:solidFill>
+              </a:rPr>
+              <a:t>❓ Preguntas frecuentes</a:t>
+            </a:r>
+          </a:p>
+        </p:txBody>
+      </p:sp>
+      <p:sp>
+        <p:nvSpPr>
+          <p:cNvPr id="3" name="TextBox 2"/>
+          <p:cNvSpPr txBox="1"/>
+          <p:nvPr/>
+        </p:nvSpPr>
+        <p:spPr>
+          <a:xfrm>
+            <a:off x="457200" y="1280160"/>
+            <a:ext cx="8229600" cy="4937760"/>
+          </a:xfrm>
+          <a:prstGeom prst="rect">
+            <a:avLst/>
+          </a:prstGeom>
+          <a:noFill/>
+        </p:spPr>
+        <p:txBody>
+          <a:bodyPr wrap="square">
+            <a:spAutoFit/>
+          </a:bodyPr>
+          <a:lstStyle/>
+          <a:p>
+            <a:pPr>
+              <a:spcAft>
+                <a:spcPts val="600"/>
+              </a:spcAft>
+            </a:pPr>
+            <a:r>
+              <a:rPr sz="1500">
+                <a:solidFill>
+                  <a:srgbClr val="22282E"/>
+                </a:solidFill>
+              </a:rPr>
+              <a:t>•  ❓ ¿-sV explota el servicio?</a:t>
+            </a:r>
+          </a:p>
+          <a:p>
+            <a:pPr>
+              <a:spcAft>
+                <a:spcPts val="600"/>
+              </a:spcAft>
+            </a:pPr>
+            <a:r>
+              <a:rPr sz="1500">
+                <a:solidFill>
+                  <a:srgbClr val="22282E"/>
+                </a:solidFill>
+              </a:rPr>
+              <a:t>•  No. Solo envía sondas benignas y compara banners/respuestas. No intenta comprometer nada.</a:t>
+            </a:r>
+          </a:p>
+          <a:p>
+            <a:pPr>
+              <a:spcAft>
+                <a:spcPts val="600"/>
+              </a:spcAft>
+            </a:pPr>
+            <a:r>
+              <a:rPr sz="1500">
+                <a:solidFill>
+                  <a:srgbClr val="22282E"/>
+                </a:solidFill>
+              </a:rPr>
+              <a:t>•  ❓ ¿Puedo confiar al 100% en la versión detectada?</a:t>
+            </a:r>
+          </a:p>
+          <a:p>
+            <a:pPr>
+              <a:spcAft>
+                <a:spcPts val="600"/>
+              </a:spcAft>
+            </a:pPr>
+            <a:r>
+              <a:rPr sz="1500">
+                <a:solidFill>
+                  <a:srgbClr val="22282E"/>
+                </a:solidFill>
+              </a:rPr>
+              <a:t>•  No siempre. Los banners pueden estar ofuscados o modificados. Trátalo como una hipótesis fuerte, verificable con más pruebas.</a:t>
+            </a:r>
+          </a:p>
+          <a:p>
+            <a:pPr>
+              <a:spcAft>
+                <a:spcPts val="600"/>
+              </a:spcAft>
+            </a:pPr>
+            <a:r>
+              <a:rPr sz="1500">
+                <a:solidFill>
+                  <a:srgbClr val="22282E"/>
+                </a:solidFill>
+              </a:rPr>
+              <a:t>•  ❓ ¿Por qué el OS a veces sale como varias opciones?</a:t>
+            </a:r>
+          </a:p>
+          <a:p>
+            <a:pPr>
+              <a:spcAft>
+                <a:spcPts val="600"/>
+              </a:spcAft>
+            </a:pPr>
+            <a:r>
+              <a:rPr sz="1500">
+                <a:solidFill>
+                  <a:srgbClr val="22282E"/>
+                </a:solidFill>
+              </a:rPr>
+              <a:t>•  Cuando ninguna huella supera el umbral de fiabilidad, Nmap lista las candidatas más probables. Dispositivos tras NAT o embebidos complican la identificación.</a:t>
+            </a:r>
+          </a:p>
+          <a:p>
+            <a:pPr>
+              <a:spcAft>
+                <a:spcPts val="600"/>
+              </a:spcAft>
+            </a:pPr>
+            <a:r>
+              <a:rPr sz="1500">
+                <a:solidFill>
+                  <a:srgbClr val="22282E"/>
+                </a:solidFill>
+              </a:rPr>
+              <a:t>•  ❓ ¿Qué gano con el CPE?</a:t>
+            </a:r>
+          </a:p>
+        </p:txBody>
+      </p:sp>
+    </p:spTree>
+  </p:cSld>
+  <p:clrMapOvr>
+    <a:masterClrMapping/>
+  </p:clrMapOvr>
+</p:sld>
+</file>
+
+<file path=ppt/slides/slide14.xml><?xml version="1.0" encoding="utf-8"?>
+<p:sld xmlns:a="http://schemas.openxmlformats.org/drawingml/2006/main" xmlns:p="http://schemas.openxmlformats.org/presentationml/2006/main" xmlns:r="http://schemas.openxmlformats.org/officeDocument/2006/relationships">
+  <p:cSld>
+    <p:spTree>
+      <p:nvGrpSpPr>
+        <p:cNvPr id="1" name=""/>
+        <p:cNvGrpSpPr/>
+        <p:nvPr/>
+      </p:nvGrpSpPr>
+      <p:grpSpPr/>
+      <p:sp>
+        <p:nvSpPr>
+          <p:cNvPr id="2" name="TextBox 1"/>
+          <p:cNvSpPr txBox="1"/>
+          <p:nvPr/>
+        </p:nvSpPr>
+        <p:spPr>
+          <a:xfrm>
+            <a:off x="457200" y="320040"/>
+            <a:ext cx="8229600" cy="822960"/>
+          </a:xfrm>
+          <a:prstGeom prst="rect">
+            <a:avLst/>
+          </a:prstGeom>
+          <a:noFill/>
+        </p:spPr>
+        <p:txBody>
+          <a:bodyPr wrap="square">
+            <a:spAutoFit/>
+          </a:bodyPr>
+          <a:lstStyle/>
+          <a:p>
+            <a:r>
+              <a:rPr sz="2600" b="1">
+                <a:solidFill>
+                  <a:srgbClr val="0B3D2E"/>
+                </a:solidFill>
+              </a:rPr>
+              <a:t>🔗 Referencias</a:t>
+            </a:r>
+          </a:p>
+        </p:txBody>
+      </p:sp>
+      <p:sp>
+        <p:nvSpPr>
+          <p:cNvPr id="3" name="TextBox 2"/>
+          <p:cNvSpPr txBox="1"/>
+          <p:nvPr/>
+        </p:nvSpPr>
+        <p:spPr>
+          <a:xfrm>
+            <a:off x="457200" y="1280160"/>
+            <a:ext cx="8229600" cy="4937760"/>
+          </a:xfrm>
+          <a:prstGeom prst="rect">
+            <a:avLst/>
+          </a:prstGeom>
+          <a:noFill/>
+        </p:spPr>
+        <p:txBody>
+          <a:bodyPr wrap="square">
+            <a:spAutoFit/>
+          </a:bodyPr>
+          <a:lstStyle/>
+          <a:p>
+            <a:pPr>
+              <a:spcAft>
+                <a:spcPts val="600"/>
+              </a:spcAft>
+            </a:pPr>
+            <a:r>
+              <a:rPr sz="1500">
+                <a:solidFill>
+                  <a:srgbClr val="22282E"/>
+                </a:solidFill>
+              </a:rPr>
               <a:t>•  Lyon, G. Nmap Network Scanning, cap. "Service and Application Version Detection" y "OS Detection". &lt;https://nmap.org/book/vscan.html&gt;</a:t>
             </a:r>
           </a:p>
@@ -3614,6 +3885,81 @@
           </a:p>
         </p:txBody>
       </p:sp>
+    </p:spTree>
+  </p:cSld>
+  <p:clrMapOvr>
+    <a:masterClrMapping/>
+  </p:clrMapOvr>
+</p:sld>
+</file>
+
+<file path=ppt/slides/slide15.xml><?xml version="1.0" encoding="utf-8"?>
+<p:sld xmlns:a="http://schemas.openxmlformats.org/drawingml/2006/main" xmlns:p="http://schemas.openxmlformats.org/presentationml/2006/main" xmlns:r="http://schemas.openxmlformats.org/officeDocument/2006/relationships">
+  <p:cSld>
+    <p:spTree>
+      <p:nvGrpSpPr>
+        <p:cNvPr id="1" name=""/>
+        <p:cNvGrpSpPr/>
+        <p:nvPr/>
+      </p:nvGrpSpPr>
+      <p:grpSpPr/>
+      <p:sp>
+        <p:nvSpPr>
+          <p:cNvPr id="2" name="TextBox 1"/>
+          <p:cNvSpPr txBox="1"/>
+          <p:nvPr/>
+        </p:nvSpPr>
+        <p:spPr>
+          <a:xfrm>
+            <a:off x="457200" y="274320"/>
+            <a:ext cx="8229600" cy="640080"/>
+          </a:xfrm>
+          <a:prstGeom prst="rect">
+            <a:avLst/>
+          </a:prstGeom>
+          <a:noFill/>
+        </p:spPr>
+        <p:txBody>
+          <a:bodyPr wrap="square">
+            <a:spAutoFit/>
+          </a:bodyPr>
+          <a:lstStyle/>
+          <a:p>
+            <a:r>
+              <a:rPr sz="2200" b="1">
+                <a:solidFill>
+                  <a:srgbClr val="0B3D2E"/>
+                </a:solidFill>
+              </a:rPr>
+              <a:t>Diagrama de la clase</a:t>
+            </a:r>
+          </a:p>
+        </p:txBody>
+      </p:sp>
+      <p:pic>
+        <p:nvPicPr>
+          <p:cNvPr id="3" name="Picture 2" descr="a5a6140c2698287b.png"/>
+          <p:cNvPicPr>
+            <a:picLocks noChangeAspect="1"/>
+          </p:cNvPicPr>
+          <p:nvPr/>
+        </p:nvPicPr>
+        <p:blipFill>
+          <a:blip r:embed="rId2"/>
+          <a:stretch>
+            <a:fillRect/>
+          </a:stretch>
+        </p:blipFill>
+        <p:spPr>
+          <a:xfrm>
+            <a:off x="3281340" y="1097280"/>
+            <a:ext cx="2581319" cy="5303520"/>
+          </a:xfrm>
+          <a:prstGeom prst="rect">
+            <a:avLst/>
+          </a:prstGeom>
+        </p:spPr>
+      </p:pic>
     </p:spTree>
   </p:cSld>
   <p:clrMapOvr>
@@ -3698,7 +4044,7 @@
                   <a:srgbClr val="22282E"/>
                 </a:solidFill>
               </a:rPr>
-              <a:t>•  Ir más allá de "puerto abierto" para saber qué servicio corre, en qué versión y sobre qué sistema operativo. El alumno aprenderá la detección de versiones (-sV), el fingerprinting de OS (-O), su relación con las vulnerabilidades conocidas y cómo interpretar la confianza de cada resultado.</a:t>
+              <a:t>•  Ir más allá de "puerto abierto" para saber qué servicio corre, en qué versión y sobre qué sistema operativo. El alumno aprenderá la detección de versiones (-sV), el fingerprinting de OS (-O), su…</a:t>
             </a:r>
           </a:p>
         </p:txBody>
@@ -4107,7 +4453,7 @@
                   <a:srgbClr val="0B3D2E"/>
                 </a:solidFill>
               </a:rPr>
-              <a:t>📖 Definiciones y características</a:t>
+              <a:t>🧠 Explicación en profundidad</a:t>
             </a:r>
           </a:p>
         </p:txBody>
@@ -4145,67 +4491,97 @@
                   <a:srgbClr val="22282E"/>
                 </a:solidFill>
               </a:rPr>
-              <a:t>•  Detección de versión (-sV): Nmap envía sondas específicas y compara las respuestas con la base nmap-service-probes para identificar producto y versión exacta.</a:t>
-            </a:r>
-          </a:p>
-          <a:p>
-            <a:pPr>
-              <a:spcAft>
-                <a:spcPts val="600"/>
-              </a:spcAft>
-            </a:pPr>
-            <a:r>
-              <a:rPr sz="1500">
-                <a:solidFill>
-                  <a:srgbClr val="22282E"/>
-                </a:solidFill>
-              </a:rPr>
-              <a:t>•  CPE (Common Platform Enumeration): identificador estandarizado (cpe:/a:apache:httpserver:2.4.41) que Nmap emite y que enlaza con bases de vulnerabilidades.</a:t>
-            </a:r>
-          </a:p>
-          <a:p>
-            <a:pPr>
-              <a:spcAft>
-                <a:spcPts val="600"/>
-              </a:spcAft>
-            </a:pPr>
-            <a:r>
-              <a:rPr sz="1500">
-                <a:solidFill>
-                  <a:srgbClr val="22282E"/>
-                </a:solidFill>
-              </a:rPr>
-              <a:t>•  OS fingerprinting (-O): analiza detalles de la pila TCP/IP (ISN, opciones, tamaño de ventana, TTL) para inferir el sistema operativo.</a:t>
-            </a:r>
-          </a:p>
-          <a:p>
-            <a:pPr>
-              <a:spcAft>
-                <a:spcPts val="600"/>
-              </a:spcAft>
-            </a:pPr>
-            <a:r>
-              <a:rPr sz="1500">
-                <a:solidFill>
-                  <a:srgbClr val="22282E"/>
-                </a:solidFill>
-              </a:rPr>
-              <a:t>•  Intensidad de versión (0–9): controla cuántas sondas se lanzan; mayor intensidad = más precisión y más ruido.</a:t>
-            </a:r>
-          </a:p>
-          <a:p>
-            <a:pPr>
-              <a:spcAft>
-                <a:spcPts val="600"/>
-              </a:spcAft>
-            </a:pPr>
-            <a:r>
-              <a:rPr sz="1500">
-                <a:solidFill>
-                  <a:srgbClr val="22282E"/>
-                </a:solidFill>
-              </a:rPr>
-              <a:t>•  Fiabilidad de OS: porcentaje que expresa cuán segura es la coincidencia; por debajo de cierto umbral Nmap muestra varias conjeturas.</a:t>
+              <a:t>•  Saber que el 8080 está abierto no permite decidir nada. Saber que ahí corre un Apache</a:t>
+            </a:r>
+          </a:p>
+          <a:p>
+            <a:pPr>
+              <a:spcAft>
+                <a:spcPts val="600"/>
+              </a:spcAft>
+            </a:pPr>
+            <a:r>
+              <a:rPr sz="1500">
+                <a:solidFill>
+                  <a:srgbClr val="22282E"/>
+                </a:solidFill>
+              </a:rPr>
+              <a:t>•  Tomcat 9.0.30 sí, porque eso ya se puede cruzar con un catálogo de vulnerabilidades</a:t>
+            </a:r>
+          </a:p>
+          <a:p>
+            <a:pPr>
+              <a:spcAft>
+                <a:spcPts val="600"/>
+              </a:spcAft>
+            </a:pPr>
+            <a:r>
+              <a:rPr sz="1500">
+                <a:solidFill>
+                  <a:srgbClr val="22282E"/>
+                </a:solidFill>
+              </a:rPr>
+              <a:t>•  conocidas y con la política de parches de la organización. La detección de versión</a:t>
+            </a:r>
+          </a:p>
+          <a:p>
+            <a:pPr>
+              <a:spcAft>
+                <a:spcPts val="600"/>
+              </a:spcAft>
+            </a:pPr>
+            <a:r>
+              <a:rPr sz="1500">
+                <a:solidFill>
+                  <a:srgbClr val="22282E"/>
+                </a:solidFill>
+              </a:rPr>
+              <a:t>•  (-sV) es el paso que convierte un mapa de puertos en un inventario accionable, y su</a:t>
+            </a:r>
+          </a:p>
+          <a:p>
+            <a:pPr>
+              <a:spcAft>
+                <a:spcPts val="600"/>
+              </a:spcAft>
+            </a:pPr>
+            <a:r>
+              <a:rPr sz="1500">
+                <a:solidFill>
+                  <a:srgbClr val="22282E"/>
+                </a:solidFill>
+              </a:rPr>
+              <a:t>•  mecánica es más sencilla de lo que parece: Nmap se conecta al puerto, escucha el</a:t>
+            </a:r>
+          </a:p>
+          <a:p>
+            <a:pPr>
+              <a:spcAft>
+                <a:spcPts val="600"/>
+              </a:spcAft>
+            </a:pPr>
+            <a:r>
+              <a:rPr sz="1500">
+                <a:solidFill>
+                  <a:srgbClr val="22282E"/>
+                </a:solidFill>
+              </a:rPr>
+              <a:t>•  banner que muchos servicios envían sin que nadie se lo pida, y si eso no basta empieza</a:t>
+            </a:r>
+          </a:p>
+          <a:p>
+            <a:pPr>
+              <a:spcAft>
+                <a:spcPts val="600"/>
+              </a:spcAft>
+            </a:pPr>
+            <a:r>
+              <a:rPr sz="1500">
+                <a:solidFill>
+                  <a:srgbClr val="22282E"/>
+                </a:solidFill>
+              </a:rPr>
+              <a:t>•  a enviar sondas del fichero nmap-service-probes, cada una diseñada para provocar una</a:t>
             </a:r>
           </a:p>
         </p:txBody>
@@ -4256,7 +4632,7 @@
                   <a:srgbClr val="0B3D2E"/>
                 </a:solidFill>
               </a:rPr>
-              <a:t>🧰 Herramientas y preparación</a:t>
+              <a:t>📖 Definiciones y características</a:t>
             </a:r>
           </a:p>
         </p:txBody>
@@ -4294,37 +4670,67 @@
                   <a:srgbClr val="22282E"/>
                 </a:solidFill>
               </a:rPr>
-              <a:t>•  Nmap 7.x con privilegios (el fingerprinting de OS requiere raw sockets).</a:t>
-            </a:r>
-          </a:p>
-          <a:p>
-            <a:pPr>
-              <a:spcAft>
-                <a:spcPts val="600"/>
-              </a:spcAft>
-            </a:pPr>
-            <a:r>
-              <a:rPr sz="1500">
-                <a:solidFill>
-                  <a:srgbClr val="22282E"/>
-                </a:solidFill>
-              </a:rPr>
-              <a:t>•  Objetivos variados en el laboratorio: un Linux con SSH/HTTP, un Windows, un servicio en versión antigua (contenedor deliberadamente desactualizado, aislado).</a:t>
-            </a:r>
-          </a:p>
-          <a:p>
-            <a:pPr>
-              <a:spcAft>
-                <a:spcPts val="600"/>
-              </a:spcAft>
-            </a:pPr>
-            <a:r>
-              <a:rPr sz="1500">
-                <a:solidFill>
-                  <a:srgbClr val="22282E"/>
-                </a:solidFill>
-              </a:rPr>
-              <a:t>•  Opcional: searchsploit / base local de CVE para correlacionar versiones.</a:t>
+              <a:t>•  Detección de versión (-sV): Nmap envía sondas específicas y compara las respuestas con la base nmap-service-probes para identificar producto y versión exacta.</a:t>
+            </a:r>
+          </a:p>
+          <a:p>
+            <a:pPr>
+              <a:spcAft>
+                <a:spcPts val="600"/>
+              </a:spcAft>
+            </a:pPr>
+            <a:r>
+              <a:rPr sz="1500">
+                <a:solidFill>
+                  <a:srgbClr val="22282E"/>
+                </a:solidFill>
+              </a:rPr>
+              <a:t>•  CPE (Common Platform Enumeration): identificador estandarizado (cpe:/a:apache:httpserver:2.4.41) que Nmap emite y que enlaza con bases de vulnerabilidades.</a:t>
+            </a:r>
+          </a:p>
+          <a:p>
+            <a:pPr>
+              <a:spcAft>
+                <a:spcPts val="600"/>
+              </a:spcAft>
+            </a:pPr>
+            <a:r>
+              <a:rPr sz="1500">
+                <a:solidFill>
+                  <a:srgbClr val="22282E"/>
+                </a:solidFill>
+              </a:rPr>
+              <a:t>•  OS fingerprinting (-O): analiza detalles de la pila TCP/IP (ISN, opciones, tamaño de ventana, TTL) para inferir el sistema operativo.</a:t>
+            </a:r>
+          </a:p>
+          <a:p>
+            <a:pPr>
+              <a:spcAft>
+                <a:spcPts val="600"/>
+              </a:spcAft>
+            </a:pPr>
+            <a:r>
+              <a:rPr sz="1500">
+                <a:solidFill>
+                  <a:srgbClr val="22282E"/>
+                </a:solidFill>
+              </a:rPr>
+              <a:t>•  Intensidad de versión (0–9): controla cuántas sondas se lanzan; mayor intensidad = más precisión y más ruido.</a:t>
+            </a:r>
+          </a:p>
+          <a:p>
+            <a:pPr>
+              <a:spcAft>
+                <a:spcPts val="600"/>
+              </a:spcAft>
+            </a:pPr>
+            <a:r>
+              <a:rPr sz="1500">
+                <a:solidFill>
+                  <a:srgbClr val="22282E"/>
+                </a:solidFill>
+              </a:rPr>
+              <a:t>•  Fiabilidad de OS: porcentaje que expresa cuán segura es la coincidencia; por debajo de cierto umbral Nmap muestra varias conjeturas.</a:t>
             </a:r>
           </a:p>
         </p:txBody>
@@ -4375,7 +4781,7 @@
                   <a:srgbClr val="0B3D2E"/>
                 </a:solidFill>
               </a:rPr>
-              <a:t>🧪 Laboratorio guiado</a:t>
+              <a:t>📔 Glosario</a:t>
             </a:r>
           </a:p>
         </p:txBody>
@@ -4413,97 +4819,97 @@
                   <a:srgbClr val="22282E"/>
                 </a:solidFill>
               </a:rPr>
-              <a:t>•  Detección de versión básica:</a:t>
-            </a:r>
-          </a:p>
-          <a:p>
-            <a:pPr>
-              <a:spcAft>
-                <a:spcPts val="600"/>
-              </a:spcAft>
-            </a:pPr>
-            <a:r>
-              <a:rPr sz="1500">
-                <a:solidFill>
-                  <a:srgbClr val="22282E"/>
-                </a:solidFill>
-              </a:rPr>
-              <a:t>•  sudo nmap -sV 192.168.56.101</a:t>
-            </a:r>
-          </a:p>
-          <a:p>
-            <a:pPr>
-              <a:spcAft>
-                <a:spcPts val="600"/>
-              </a:spcAft>
-            </a:pPr>
-            <a:r>
-              <a:rPr sz="1500">
-                <a:solidFill>
-                  <a:srgbClr val="22282E"/>
-                </a:solidFill>
-              </a:rPr>
-              <a:t>•  Aumenta intensidad para servicios difíciles:</a:t>
-            </a:r>
-          </a:p>
-          <a:p>
-            <a:pPr>
-              <a:spcAft>
-                <a:spcPts val="600"/>
-              </a:spcAft>
-            </a:pPr>
-            <a:r>
-              <a:rPr sz="1500">
-                <a:solidFill>
-                  <a:srgbClr val="22282E"/>
-                </a:solidFill>
-              </a:rPr>
-              <a:t>•  sudo nmap -sV --version-intensity 9 192.168.56.101</a:t>
-            </a:r>
-          </a:p>
-          <a:p>
-            <a:pPr>
-              <a:spcAft>
-                <a:spcPts val="600"/>
-              </a:spcAft>
-            </a:pPr>
-            <a:r>
-              <a:rPr sz="1500">
-                <a:solidFill>
-                  <a:srgbClr val="22282E"/>
-                </a:solidFill>
-              </a:rPr>
-              <a:t>•  Detección de OS:</a:t>
-            </a:r>
-          </a:p>
-          <a:p>
-            <a:pPr>
-              <a:spcAft>
-                <a:spcPts val="600"/>
-              </a:spcAft>
-            </a:pPr>
-            <a:r>
-              <a:rPr sz="1500">
-                <a:solidFill>
-                  <a:srgbClr val="22282E"/>
-                </a:solidFill>
-              </a:rPr>
-              <a:t>•  sudo nmap -O 192.168.56.101</a:t>
-            </a:r>
-          </a:p>
-          <a:p>
-            <a:pPr>
-              <a:spcAft>
-                <a:spcPts val="600"/>
-              </a:spcAft>
-            </a:pPr>
-            <a:r>
-              <a:rPr sz="1500">
-                <a:solidFill>
-                  <a:srgbClr val="22282E"/>
-                </a:solidFill>
-              </a:rPr>
-              <a:t>•  Fuerza conjeturas cuando no hay coincidencia exacta:</a:t>
+              <a:t>•  Término — Definición concisa</a:t>
+            </a:r>
+          </a:p>
+          <a:p>
+            <a:pPr>
+              <a:spcAft>
+                <a:spcPts val="600"/>
+              </a:spcAft>
+            </a:pPr>
+            <a:r>
+              <a:rPr sz="1500">
+                <a:solidFill>
+                  <a:srgbClr val="22282E"/>
+                </a:solidFill>
+              </a:rPr>
+              <a:t>•  -sV — Detección de versión de servicio mediante banners y sondas</a:t>
+            </a:r>
+          </a:p>
+          <a:p>
+            <a:pPr>
+              <a:spcAft>
+                <a:spcPts val="600"/>
+              </a:spcAft>
+            </a:pPr>
+            <a:r>
+              <a:rPr sz="1500">
+                <a:solidFill>
+                  <a:srgbClr val="22282E"/>
+                </a:solidFill>
+              </a:rPr>
+              <a:t>•  Banner — Texto de presentación que muchos servicios envían al conectar</a:t>
+            </a:r>
+          </a:p>
+          <a:p>
+            <a:pPr>
+              <a:spcAft>
+                <a:spcPts val="600"/>
+              </a:spcAft>
+            </a:pPr>
+            <a:r>
+              <a:rPr sz="1500">
+                <a:solidFill>
+                  <a:srgbClr val="22282E"/>
+                </a:solidFill>
+              </a:rPr>
+              <a:t>•  nmap-service-probes — Base de sondas y expresiones regulares de identificación</a:t>
+            </a:r>
+          </a:p>
+          <a:p>
+            <a:pPr>
+              <a:spcAft>
+                <a:spcPts val="600"/>
+              </a:spcAft>
+            </a:pPr>
+            <a:r>
+              <a:rPr sz="1500">
+                <a:solidFill>
+                  <a:srgbClr val="22282E"/>
+                </a:solidFill>
+              </a:rPr>
+              <a:t>•  --version-intensity — Número de sondas a lanzar (0 = mínimo, 9 = exhaustivo)</a:t>
+            </a:r>
+          </a:p>
+          <a:p>
+            <a:pPr>
+              <a:spcAft>
+                <a:spcPts val="600"/>
+              </a:spcAft>
+            </a:pPr>
+            <a:r>
+              <a:rPr sz="1500">
+                <a:solidFill>
+                  <a:srgbClr val="22282E"/>
+                </a:solidFill>
+              </a:rPr>
+              <a:t>•  CPE — Identificador normalizado de plataforma (cpe:/a:apache:tomcat:9.0.30)</a:t>
+            </a:r>
+          </a:p>
+          <a:p>
+            <a:pPr>
+              <a:spcAft>
+                <a:spcPts val="600"/>
+              </a:spcAft>
+            </a:pPr>
+            <a:r>
+              <a:rPr sz="1500">
+                <a:solidFill>
+                  <a:srgbClr val="22282E"/>
+                </a:solidFill>
+              </a:rPr>
+              <a:t>•  NVD — Base de datos nacional de vulnerabilidades; indexa CVE por CPE</a:t>
             </a:r>
           </a:p>
         </p:txBody>
@@ -4554,7 +4960,7 @@
                   <a:srgbClr val="0B3D2E"/>
                 </a:solidFill>
               </a:rPr>
-              <a:t>✍️ Ejercicios</a:t>
+              <a:t>🧰 Herramientas y preparación</a:t>
             </a:r>
           </a:p>
         </p:txBody>
@@ -4592,82 +4998,37 @@
                   <a:srgbClr val="22282E"/>
                 </a:solidFill>
               </a:rPr>
-              <a:t>•  Escanea un servicio y anota producto, versión y CPE exacto.</a:t>
-            </a:r>
-          </a:p>
-          <a:p>
-            <a:pPr>
-              <a:spcAft>
-                <a:spcPts val="600"/>
-              </a:spcAft>
-            </a:pPr>
-            <a:r>
-              <a:rPr sz="1500">
-                <a:solidFill>
-                  <a:srgbClr val="22282E"/>
-                </a:solidFill>
-              </a:rPr>
-              <a:t>•  Compara -O con y sin --osscan-guess en un host difícil de identificar.</a:t>
-            </a:r>
-          </a:p>
-          <a:p>
-            <a:pPr>
-              <a:spcAft>
-                <a:spcPts val="600"/>
-              </a:spcAft>
-            </a:pPr>
-            <a:r>
-              <a:rPr sz="1500">
-                <a:solidFill>
-                  <a:srgbClr val="22282E"/>
-                </a:solidFill>
-              </a:rPr>
-              <a:t>•  Ejecuta -A y clasifica qué información aporta cada sección de la salida.</a:t>
-            </a:r>
-          </a:p>
-          <a:p>
-            <a:pPr>
-              <a:spcAft>
-                <a:spcPts val="600"/>
-              </a:spcAft>
-            </a:pPr>
-            <a:r>
-              <a:rPr sz="1500">
-                <a:solidFill>
-                  <a:srgbClr val="22282E"/>
-                </a:solidFill>
-              </a:rPr>
-              <a:t>•  Investiga por qué la detección de OS necesita al menos un puerto abierto y uno cerrado.</a:t>
-            </a:r>
-          </a:p>
-          <a:p>
-            <a:pPr>
-              <a:spcAft>
-                <a:spcPts val="600"/>
-              </a:spcAft>
-            </a:pPr>
-            <a:r>
-              <a:rPr sz="1500">
-                <a:solidFill>
-                  <a:srgbClr val="22282E"/>
-                </a:solidFill>
-              </a:rPr>
-              <a:t>•  Toma un CPE detectado y busca (sin explotar) CVEs asociados en NVD.</a:t>
-            </a:r>
-          </a:p>
-          <a:p>
-            <a:pPr>
-              <a:spcAft>
-                <a:spcPts val="600"/>
-              </a:spcAft>
-            </a:pPr>
-            <a:r>
-              <a:rPr sz="1500">
-                <a:solidFill>
-                  <a:srgbClr val="22282E"/>
-                </a:solidFill>
-              </a:rPr>
-              <a:t>•  Ajusta --version-intensity de 0 a 9 sobre el mismo host y compara resultados y ruido.</a:t>
+              <a:t>•  Nmap 7.x con privilegios (el fingerprinting de OS requiere raw sockets).</a:t>
+            </a:r>
+          </a:p>
+          <a:p>
+            <a:pPr>
+              <a:spcAft>
+                <a:spcPts val="600"/>
+              </a:spcAft>
+            </a:pPr>
+            <a:r>
+              <a:rPr sz="1500">
+                <a:solidFill>
+                  <a:srgbClr val="22282E"/>
+                </a:solidFill>
+              </a:rPr>
+              <a:t>•  Objetivos variados en el laboratorio: un Linux con SSH/HTTP, un Windows, un servicio en versión antigua (contenedor deliberadamente desactualizado, aislado).</a:t>
+            </a:r>
+          </a:p>
+          <a:p>
+            <a:pPr>
+              <a:spcAft>
+                <a:spcPts val="600"/>
+              </a:spcAft>
+            </a:pPr>
+            <a:r>
+              <a:rPr sz="1500">
+                <a:solidFill>
+                  <a:srgbClr val="22282E"/>
+                </a:solidFill>
+              </a:rPr>
+              <a:t>•  Opcional: searchsploit / base local de CVE para correlacionar versiones.</a:t>
             </a:r>
           </a:p>
         </p:txBody>
@@ -4718,7 +5079,7 @@
                   <a:srgbClr val="0B3D2E"/>
                 </a:solidFill>
               </a:rPr>
-              <a:t>📝 Reto verificable</a:t>
+              <a:t>🧪 Laboratorio guiado</a:t>
             </a:r>
           </a:p>
         </p:txBody>
@@ -4756,22 +5117,97 @@
                   <a:srgbClr val="22282E"/>
                 </a:solidFill>
               </a:rPr>
-              <a:t>•  Genera un inventario de servicios de un host de laboratorio con producto, versión y CPE, y añade una columna "riesgo potencial" citando al menos un CVE público asociado a una de las versiones detectadas (solo referencia, sin explotación). Entrega la salida -oA y la tabla.</a:t>
-            </a:r>
-          </a:p>
-          <a:p>
-            <a:pPr>
-              <a:spcAft>
-                <a:spcPts val="600"/>
-              </a:spcAft>
-            </a:pPr>
-            <a:r>
-              <a:rPr sz="1500">
-                <a:solidFill>
-                  <a:srgbClr val="22282E"/>
-                </a:solidFill>
-              </a:rPr>
-              <a:t>•  Criterio de aceptación: las versiones y CPE coinciden con un reescaneo del revisor, y el CVE citado corresponde realmente a la versión reportada según NVD.</a:t>
+              <a:t>•  Detección de versión básica:</a:t>
+            </a:r>
+          </a:p>
+          <a:p>
+            <a:pPr>
+              <a:spcAft>
+                <a:spcPts val="600"/>
+              </a:spcAft>
+            </a:pPr>
+            <a:r>
+              <a:rPr sz="1500">
+                <a:solidFill>
+                  <a:srgbClr val="22282E"/>
+                </a:solidFill>
+              </a:rPr>
+              <a:t>•  Aumenta intensidad para servicios difíciles:</a:t>
+            </a:r>
+          </a:p>
+          <a:p>
+            <a:pPr>
+              <a:spcAft>
+                <a:spcPts val="600"/>
+              </a:spcAft>
+            </a:pPr>
+            <a:r>
+              <a:rPr sz="1500">
+                <a:solidFill>
+                  <a:srgbClr val="22282E"/>
+                </a:solidFill>
+              </a:rPr>
+              <a:t>•  Detección de OS:</a:t>
+            </a:r>
+          </a:p>
+          <a:p>
+            <a:pPr>
+              <a:spcAft>
+                <a:spcPts val="600"/>
+              </a:spcAft>
+            </a:pPr>
+            <a:r>
+              <a:rPr sz="1500">
+                <a:solidFill>
+                  <a:srgbClr val="22282E"/>
+                </a:solidFill>
+              </a:rPr>
+              <a:t>•  Fuerza conjeturas cuando no hay coincidencia exacta:</a:t>
+            </a:r>
+          </a:p>
+          <a:p>
+            <a:pPr>
+              <a:spcAft>
+                <a:spcPts val="600"/>
+              </a:spcAft>
+            </a:pPr>
+            <a:r>
+              <a:rPr sz="1500">
+                <a:solidFill>
+                  <a:srgbClr val="22282E"/>
+                </a:solidFill>
+              </a:rPr>
+              <a:t>•  Escaneo agresivo (versión + OS + scripts por defecto + traceroute):</a:t>
+            </a:r>
+          </a:p>
+          <a:p>
+            <a:pPr>
+              <a:spcAft>
+                <a:spcPts val="600"/>
+              </a:spcAft>
+            </a:pPr>
+            <a:r>
+              <a:rPr sz="1500">
+                <a:solidFill>
+                  <a:srgbClr val="22282E"/>
+                </a:solidFill>
+              </a:rPr>
+              <a:t>•  Limita a puertos abiertos conocidos para ir más rápido:</a:t>
+            </a:r>
+          </a:p>
+          <a:p>
+            <a:pPr>
+              <a:spcAft>
+                <a:spcPts val="600"/>
+              </a:spcAft>
+            </a:pPr>
+            <a:r>
+              <a:rPr sz="1500">
+                <a:solidFill>
+                  <a:srgbClr val="22282E"/>
+                </a:solidFill>
+              </a:rPr>
+              <a:t>•  Extrae los CPE de la salida XML:</a:t>
             </a:r>
           </a:p>
         </p:txBody>
